--- a/dist/초2/도덕·윤리/공감과협력/초2_도덕·윤리_공감과협력_01_공감과공정한사용.pptx
+++ b/dist/초2/도덕·윤리/공감과협력/초2_도덕·윤리_공감과협력_01_공감과공정한사용.pptx
@@ -120,20 +120,20 @@
   <p:extLst>
     <p:ext uri="{521415D9-36F7-43E2-AB2F-B90AF26B5E84}">
       <p14:sectionLst xmlns:p14="http://schemas.microsoft.com/office/powerpoint/2010/main">
-        <p14:section name="도입" id="{9698e5e2-f385-6697-d18d-23e8d2303f30}">
+        <p14:section name="도입" id="{b1d70b63-939e-0186-c2c1-8a604b298e0b}">
           <p14:sldIdLst>
             <p14:sldId id="256"/>
             <p14:sldId id="257"/>
           </p14:sldIdLst>
         </p14:section>
-        <p14:section name="개념" id="{8231bdb2-8530-28c1-4599-5f85edbd2aa9}">
+        <p14:section name="개념" id="{f4bb544a-137b-fc8e-7a31-9db94457d1f1}">
           <p14:sldIdLst>
             <p14:sldId id="258"/>
             <p14:sldId id="259"/>
             <p14:sldId id="261"/>
           </p14:sldIdLst>
         </p14:section>
-        <p14:section name="연습" id="{fe785873-2eab-b915-12cb-80e54b5467ca}">
+        <p14:section name="연습" id="{a50e46f6-8e4c-7d01-1763-77a861683577}">
           <p14:sldIdLst>
             <p14:sldId id="260"/>
             <p14:sldId id="262"/>
@@ -141,25 +141,25 @@
             <p14:sldId id="264"/>
           </p14:sldIdLst>
         </p14:section>
-        <p14:section name="개념" id="{6ab79639-796f-7c52-b290-8ec180c2b2d4}">
+        <p14:section name="개념" id="{45b47a5a-6a8a-b7c1-1f93-52c46aa7387c}">
           <p14:sldIdLst/>
         </p14:section>
-        <p14:section name="연습" id="{2eea5166-7aaa-f9ca-6b3d-209bbccb50ae}">
+        <p14:section name="연습" id="{c215b3c7-3d00-d805-0339-3d8efd02214f}">
           <p14:sldIdLst/>
         </p14:section>
-        <p14:section name="확인" id="{ec0e0651-b65f-fbaa-668d-66c0af95525b}">
+        <p14:section name="확인" id="{1d712e6f-77a3-aa46-a4f0-111321ce0552}">
           <p14:sldIdLst>
             <p14:sldId id="265"/>
             <p14:sldId id="266"/>
             <p14:sldId id="267"/>
           </p14:sldIdLst>
         </p14:section>
-        <p14:section name="정리" id="{0dec6460-63fe-5d90-e76b-c2b8ea51151c}">
+        <p14:section name="정리" id="{760e4a6f-9968-39e5-61b6-afce4965bd1c}">
           <p14:sldIdLst>
             <p14:sldId id="268"/>
           </p14:sldIdLst>
         </p14:section>
-        <p14:section name="보충" id="{45ecb1d0-3e5d-31ee-8841-2d04256ef891}">
+        <p14:section name="보충" id="{5ccf0fd4-47f4-7c81-e59f-5372b16ccf69}">
           <p14:sldIdLst>
             <p14:sldId id="269"/>
           </p14:sldIdLst>

--- a/dist/초2/도덕·윤리/공감과협력/초2_도덕·윤리_공감과협력_01_공감과공정한사용.pptx
+++ b/dist/초2/도덕·윤리/공감과협력/초2_도덕·윤리_공감과협력_01_공감과공정한사용.pptx
@@ -120,20 +120,20 @@
   <p:extLst>
     <p:ext uri="{521415D9-36F7-43E2-AB2F-B90AF26B5E84}">
       <p14:sectionLst xmlns:p14="http://schemas.microsoft.com/office/powerpoint/2010/main">
-        <p14:section name="도입" id="{b1d70b63-939e-0186-c2c1-8a604b298e0b}">
+        <p14:section name="도입" id="{e9ffb7ce-f5ab-eb1a-9b7a-05a60611c3c6}">
           <p14:sldIdLst>
             <p14:sldId id="256"/>
             <p14:sldId id="257"/>
           </p14:sldIdLst>
         </p14:section>
-        <p14:section name="개념" id="{f4bb544a-137b-fc8e-7a31-9db94457d1f1}">
+        <p14:section name="개념" id="{6b9e3cbe-980e-f482-ab1c-e6e966096a98}">
           <p14:sldIdLst>
             <p14:sldId id="258"/>
             <p14:sldId id="259"/>
             <p14:sldId id="261"/>
           </p14:sldIdLst>
         </p14:section>
-        <p14:section name="연습" id="{a50e46f6-8e4c-7d01-1763-77a861683577}">
+        <p14:section name="연습" id="{88f25541-e03a-91ec-de5c-46403ce7ba84}">
           <p14:sldIdLst>
             <p14:sldId id="260"/>
             <p14:sldId id="262"/>
@@ -141,25 +141,25 @@
             <p14:sldId id="264"/>
           </p14:sldIdLst>
         </p14:section>
-        <p14:section name="개념" id="{45b47a5a-6a8a-b7c1-1f93-52c46aa7387c}">
+        <p14:section name="개념" id="{23f5d3f8-b786-c3de-d33b-9524f6c7098b}">
           <p14:sldIdLst/>
         </p14:section>
-        <p14:section name="연습" id="{c215b3c7-3d00-d805-0339-3d8efd02214f}">
+        <p14:section name="연습" id="{3e49a969-549d-66c8-8486-e34d262c34a7}">
           <p14:sldIdLst/>
         </p14:section>
-        <p14:section name="확인" id="{1d712e6f-77a3-aa46-a4f0-111321ce0552}">
+        <p14:section name="확인" id="{759717e4-ae60-7a01-e29e-dfec84ebb963}">
           <p14:sldIdLst>
             <p14:sldId id="265"/>
             <p14:sldId id="266"/>
             <p14:sldId id="267"/>
           </p14:sldIdLst>
         </p14:section>
-        <p14:section name="정리" id="{760e4a6f-9968-39e5-61b6-afce4965bd1c}">
+        <p14:section name="정리" id="{e85be6e2-99d0-04c7-d04f-731c0e1c368f}">
           <p14:sldIdLst>
             <p14:sldId id="268"/>
           </p14:sldIdLst>
         </p14:section>
-        <p14:section name="보충" id="{5ccf0fd4-47f4-7c81-e59f-5372b16ccf69}">
+        <p14:section name="보충" id="{0fc61abb-0f2f-dc50-5edd-afa10aba1a73}">
           <p14:sldIdLst>
             <p14:sldId id="269"/>
           </p14:sldIdLst>
@@ -1080,7 +1080,7 @@
 막히면
 - 부모가 표정을 지어 보이고 아이가 마음 낱말을 맞히는 놀이를 합니다.
 주의
-- 이 차시는 계획상 앞 차시가 없습니다. 보충으로도 어렵다면 초1 ‘나는 소중해요’, ‘맡은 일과 배려’처럼 차례 지키기와 배려를 다루는 차시를 먼저 합니다.
+- 보충으로도 어렵다면 초1 ‘나는 소중해요’, ‘맡은 일과 배려’처럼 차례 지키기와 배려를 다루는 차시를 먼저 합니다.
 - 보충이 길어지면 오늘은 여기까지 하고 다음 날 S02부터 다시 시작합니다.</a:t>
             </a:r>
             <a:endParaRPr lang="en-US" dirty="0"/>
@@ -1180,7 +1180,7 @@
 - ② “아프고 놀랐을 것 같아요.” “괜찮아? 하고 물어봐요.”
 막히면
 - ①에서 먼저 타겠다고 하거나 ②에서 친구의 마음을 말하지 못하면 S14(보충)의 마음 낱말 카드를 먼저 합니다.
-- 이 차시는 계획상 앞 차시가 없습니다. 초1 ‘나는 소중해요’(인사·경청·차례 지키기), ‘맡은 일과 배려’와 이어지는 내용입니다.
+- 초1 ‘나는 소중해요’(인사·경청·차례 지키기), ‘맡은 일과 배려’와 이어지는 내용입니다.
 주의
 - 맞히는 문제가 아니라 아이가 평소에 어떻게 생각하는지 듣는 장입니다. 대답마다 “왜 그렇게 생각해?”라고 한 번 더 묻습니다.</a:t>
             </a:r>
